--- a/demo/AI-release-note-generation Team - Capstone Project_Bhargavi.pptx
+++ b/demo/AI-release-note-generation Team - Capstone Project_Bhargavi.pptx
@@ -5,7 +5,7 @@
     <p:sldMasterId id="2147483648" r:id="rId1"/>
   </p:sldMasterIdLst>
   <p:notesMasterIdLst>
-    <p:notesMasterId r:id="rId12"/>
+    <p:notesMasterId r:id="rId13"/>
   </p:notesMasterIdLst>
   <p:sldIdLst>
     <p:sldId id="307" r:id="rId2"/>
@@ -15,9 +15,10 @@
     <p:sldId id="301" r:id="rId6"/>
     <p:sldId id="302" r:id="rId7"/>
     <p:sldId id="303" r:id="rId8"/>
-    <p:sldId id="304" r:id="rId9"/>
-    <p:sldId id="305" r:id="rId10"/>
-    <p:sldId id="308" r:id="rId11"/>
+    <p:sldId id="309" r:id="rId9"/>
+    <p:sldId id="310" r:id="rId10"/>
+    <p:sldId id="305" r:id="rId11"/>
+    <p:sldId id="308" r:id="rId12"/>
   </p:sldIdLst>
   <p:sldSz cx="9144000" cy="5143500" type="screen16x9"/>
   <p:notesSz cx="5143500" cy="9144000"/>
@@ -964,7 +965,7 @@
           <a:p>
             <a:fld id="{F7021451-1387-4CA6-816F-3879F97B5CBC}" type="slidenum">
               <a:rPr lang="en-US"/>
-              <a:t>9</a:t>
+              <a:t>10</a:t>
             </a:fld>
             <a:endParaRPr lang="en-US"/>
           </a:p>
@@ -1072,7 +1073,7 @@
           <a:p>
             <a:fld id="{F7021451-1387-4CA6-816F-3879F97B5CBC}" type="slidenum">
               <a:rPr lang="en-US"/>
-              <a:t>10</a:t>
+              <a:t>11</a:t>
             </a:fld>
             <a:endParaRPr lang="en-US"/>
           </a:p>
@@ -2131,6 +2132,793 @@
 <file path=ppt/slides/slide10.xml><?xml version="1.0" encoding="utf-8"?>
 <p:sld xmlns:a="http://schemas.openxmlformats.org/drawingml/2006/main" xmlns:r="http://schemas.openxmlformats.org/officeDocument/2006/relationships" xmlns:p="http://schemas.openxmlformats.org/presentationml/2006/main">
   <p:cSld>
+    <p:spTree>
+      <p:nvGrpSpPr>
+        <p:cNvPr id="1" name=""/>
+        <p:cNvGrpSpPr/>
+        <p:nvPr/>
+      </p:nvGrpSpPr>
+      <p:grpSpPr>
+        <a:xfrm>
+          <a:off x="0" y="0"/>
+          <a:ext cx="0" cy="0"/>
+          <a:chOff x="0" y="0"/>
+          <a:chExt cx="0" cy="0"/>
+        </a:xfrm>
+      </p:grpSpPr>
+      <p:sp>
+        <p:nvSpPr>
+          <p:cNvPr id="2" name="Shape 0"/>
+          <p:cNvSpPr/>
+          <p:nvPr/>
+        </p:nvSpPr>
+        <p:spPr>
+          <a:xfrm>
+            <a:off x="457200" y="365760"/>
+            <a:ext cx="896112" cy="237744"/>
+          </a:xfrm>
+          <a:prstGeom prst="roundRect">
+            <a:avLst>
+              <a:gd name="adj" fmla="val 50000"/>
+            </a:avLst>
+          </a:prstGeom>
+          <a:noFill/>
+          <a:ln/>
+        </p:spPr>
+      </p:sp>
+      <p:sp>
+        <p:nvSpPr>
+          <p:cNvPr id="3" name="Text 1"/>
+          <p:cNvSpPr/>
+          <p:nvPr/>
+        </p:nvSpPr>
+        <p:spPr>
+          <a:xfrm>
+            <a:off x="457200" y="365760"/>
+            <a:ext cx="896112" cy="237744"/>
+          </a:xfrm>
+          <a:prstGeom prst="rect">
+            <a:avLst/>
+          </a:prstGeom>
+          <a:noFill/>
+          <a:ln/>
+        </p:spPr>
+        <p:txBody>
+          <a:bodyPr wrap="square" lIns="0" tIns="0" rIns="0" bIns="0" rtlCol="0" anchor="ctr"/>
+          <a:lstStyle/>
+          <a:p>
+            <a:r>
+              <a:rPr lang="en-US" sz="1100" b="1" kern="0" spc="150" dirty="0">
+                <a:solidFill>
+                  <a:srgbClr val="2A9D8F"/>
+                </a:solidFill>
+                <a:latin typeface="Calibri" pitchFamily="34" charset="0"/>
+                <a:cs typeface="Calibri" pitchFamily="34" charset="-120"/>
+              </a:rPr>
+              <a:t>04  IMPACT</a:t>
+            </a:r>
+          </a:p>
+        </p:txBody>
+      </p:sp>
+      <p:sp>
+        <p:nvSpPr>
+          <p:cNvPr id="4" name="Text 2"/>
+          <p:cNvSpPr/>
+          <p:nvPr/>
+        </p:nvSpPr>
+        <p:spPr>
+          <a:xfrm>
+            <a:off x="457200" y="640080"/>
+            <a:ext cx="8229600" cy="502920"/>
+          </a:xfrm>
+          <a:prstGeom prst="rect">
+            <a:avLst/>
+          </a:prstGeom>
+          <a:noFill/>
+          <a:ln/>
+        </p:spPr>
+        <p:txBody>
+          <a:bodyPr wrap="square" lIns="0" tIns="0" rIns="0" bIns="0" rtlCol="0" anchor="ctr"/>
+          <a:lstStyle/>
+          <a:p>
+            <a:r>
+              <a:rPr lang="en-US" sz="2500" b="1" dirty="0">
+                <a:solidFill>
+                  <a:srgbClr val="12355B"/>
+                </a:solidFill>
+                <a:latin typeface="Cambria" pitchFamily="34" charset="0"/>
+                <a:ea typeface="Cambria" pitchFamily="34" charset="-122"/>
+              </a:rPr>
+              <a:t>Business Value</a:t>
+            </a:r>
+          </a:p>
+        </p:txBody>
+      </p:sp>
+      <p:sp>
+        <p:nvSpPr>
+          <p:cNvPr id="5" name="Shape 3"/>
+          <p:cNvSpPr/>
+          <p:nvPr/>
+        </p:nvSpPr>
+        <p:spPr>
+          <a:xfrm>
+            <a:off x="457200" y="1313687"/>
+            <a:ext cx="6248400" cy="3429000"/>
+          </a:xfrm>
+          <a:prstGeom prst="roundRect">
+            <a:avLst>
+              <a:gd name="adj" fmla="val 2667"/>
+            </a:avLst>
+          </a:prstGeom>
+          <a:solidFill>
+            <a:srgbClr val="EEF1F3"/>
+          </a:solidFill>
+          <a:ln w="9525">
+            <a:solidFill>
+              <a:srgbClr val="EEF1F3"/>
+            </a:solidFill>
+            <a:prstDash val="solid"/>
+          </a:ln>
+          <a:effectLst>
+            <a:outerShdw blurRad="152400" dist="38100" dir="5400000" algn="bl" rotWithShape="0">
+              <a:srgbClr val="000000">
+                <a:alpha val="35000"/>
+              </a:srgbClr>
+            </a:outerShdw>
+          </a:effectLst>
+        </p:spPr>
+        <p:txBody>
+          <a:bodyPr/>
+          <a:lstStyle/>
+          <a:p>
+            <a:endParaRPr lang="en-IN" dirty="0"/>
+          </a:p>
+        </p:txBody>
+      </p:sp>
+      <p:sp>
+        <p:nvSpPr>
+          <p:cNvPr id="6" name="Shape 4"/>
+          <p:cNvSpPr/>
+          <p:nvPr/>
+        </p:nvSpPr>
+        <p:spPr>
+          <a:xfrm>
+            <a:off x="731522" y="1542287"/>
+            <a:ext cx="457200" cy="457200"/>
+          </a:xfrm>
+          <a:prstGeom prst="ellipse">
+            <a:avLst/>
+          </a:prstGeom>
+          <a:solidFill>
+            <a:srgbClr val="10B981">
+              <a:alpha val="22000"/>
+            </a:srgbClr>
+          </a:solidFill>
+          <a:ln w="12700">
+            <a:solidFill>
+              <a:srgbClr val="10B981"/>
+            </a:solidFill>
+            <a:prstDash val="solid"/>
+          </a:ln>
+        </p:spPr>
+      </p:sp>
+      <p:pic>
+        <p:nvPicPr>
+          <p:cNvPr id="7" name="Image 0" descr="preencoded.png"/>
+          <p:cNvPicPr>
+            <a:picLocks noChangeAspect="1"/>
+          </p:cNvPicPr>
+          <p:nvPr/>
+        </p:nvPicPr>
+        <p:blipFill>
+          <a:blip r:embed="rId3"/>
+          <a:stretch>
+            <a:fillRect/>
+          </a:stretch>
+        </p:blipFill>
+        <p:spPr>
+          <a:xfrm>
+            <a:off x="841250" y="1652015"/>
+            <a:ext cx="237744" cy="237744"/>
+          </a:xfrm>
+          <a:prstGeom prst="rect">
+            <a:avLst/>
+          </a:prstGeom>
+        </p:spPr>
+      </p:pic>
+      <p:sp>
+        <p:nvSpPr>
+          <p:cNvPr id="8" name="Text 5"/>
+          <p:cNvSpPr/>
+          <p:nvPr/>
+        </p:nvSpPr>
+        <p:spPr>
+          <a:xfrm>
+            <a:off x="1325882" y="1542287"/>
+            <a:ext cx="3063240" cy="457200"/>
+          </a:xfrm>
+          <a:prstGeom prst="rect">
+            <a:avLst/>
+          </a:prstGeom>
+          <a:noFill/>
+          <a:ln/>
+        </p:spPr>
+        <p:txBody>
+          <a:bodyPr wrap="square" lIns="0" tIns="0" rIns="0" bIns="0" rtlCol="0" anchor="ctr"/>
+          <a:lstStyle/>
+          <a:p>
+            <a:pPr marL="0" indent="0" algn="l">
+              <a:buNone/>
+            </a:pPr>
+            <a:r>
+              <a:rPr lang="en-US" sz="1800" b="1" dirty="0">
+                <a:solidFill>
+                  <a:srgbClr val="12355B"/>
+                </a:solidFill>
+                <a:latin typeface="Calibri" pitchFamily="34" charset="0"/>
+                <a:ea typeface="Calibri" pitchFamily="34" charset="-122"/>
+                <a:cs typeface="Calibri" pitchFamily="34" charset="-120"/>
+              </a:rPr>
+              <a:t>Benefits</a:t>
+            </a:r>
+            <a:endParaRPr lang="en-US" sz="1800" dirty="0">
+              <a:solidFill>
+                <a:srgbClr val="12355B"/>
+              </a:solidFill>
+            </a:endParaRPr>
+          </a:p>
+        </p:txBody>
+      </p:sp>
+      <p:sp>
+        <p:nvSpPr>
+          <p:cNvPr id="9" name="Shape 6"/>
+          <p:cNvSpPr/>
+          <p:nvPr/>
+        </p:nvSpPr>
+        <p:spPr>
+          <a:xfrm>
+            <a:off x="731522" y="2255519"/>
+            <a:ext cx="292608" cy="292608"/>
+          </a:xfrm>
+          <a:prstGeom prst="ellipse">
+            <a:avLst/>
+          </a:prstGeom>
+          <a:solidFill>
+            <a:srgbClr val="10B981">
+              <a:alpha val="18000"/>
+            </a:srgbClr>
+          </a:solidFill>
+          <a:ln w="9525">
+            <a:solidFill>
+              <a:srgbClr val="10B981">
+                <a:alpha val="50000"/>
+              </a:srgbClr>
+            </a:solidFill>
+            <a:prstDash val="solid"/>
+          </a:ln>
+        </p:spPr>
+      </p:sp>
+      <p:pic>
+        <p:nvPicPr>
+          <p:cNvPr id="10" name="Image 1" descr="preencoded.png"/>
+          <p:cNvPicPr>
+            <a:picLocks noChangeAspect="1"/>
+          </p:cNvPicPr>
+          <p:nvPr/>
+        </p:nvPicPr>
+        <p:blipFill>
+          <a:blip r:embed="rId4"/>
+          <a:stretch>
+            <a:fillRect/>
+          </a:stretch>
+        </p:blipFill>
+        <p:spPr>
+          <a:xfrm>
+            <a:off x="804674" y="2328671"/>
+            <a:ext cx="146304" cy="146304"/>
+          </a:xfrm>
+          <a:prstGeom prst="rect">
+            <a:avLst/>
+          </a:prstGeom>
+        </p:spPr>
+      </p:pic>
+      <p:sp>
+        <p:nvSpPr>
+          <p:cNvPr id="11" name="Text 7"/>
+          <p:cNvSpPr/>
+          <p:nvPr/>
+        </p:nvSpPr>
+        <p:spPr>
+          <a:xfrm>
+            <a:off x="1143002" y="2182367"/>
+            <a:ext cx="4046220" cy="484632"/>
+          </a:xfrm>
+          <a:prstGeom prst="rect">
+            <a:avLst/>
+          </a:prstGeom>
+          <a:noFill/>
+          <a:ln/>
+        </p:spPr>
+        <p:txBody>
+          <a:bodyPr wrap="square" lIns="0" tIns="0" rIns="0" bIns="0" rtlCol="0" anchor="ctr"/>
+          <a:lstStyle/>
+          <a:p>
+            <a:pPr marL="0" indent="0" algn="l">
+              <a:buNone/>
+            </a:pPr>
+            <a:r>
+              <a:rPr lang="en-US" sz="1200" dirty="0">
+                <a:solidFill>
+                  <a:schemeClr val="bg2">
+                    <a:lumMod val="50000"/>
+                  </a:schemeClr>
+                </a:solidFill>
+                <a:latin typeface="Calibri" pitchFamily="34" charset="0"/>
+                <a:ea typeface="Calibri" pitchFamily="34" charset="-122"/>
+                <a:cs typeface="Calibri" pitchFamily="34" charset="-120"/>
+              </a:rPr>
+              <a:t>Reduced manual documentation effort in release note creation</a:t>
+            </a:r>
+            <a:endParaRPr lang="en-US" sz="1200" dirty="0">
+              <a:solidFill>
+                <a:schemeClr val="bg2">
+                  <a:lumMod val="50000"/>
+                </a:schemeClr>
+              </a:solidFill>
+            </a:endParaRPr>
+          </a:p>
+        </p:txBody>
+      </p:sp>
+      <p:sp>
+        <p:nvSpPr>
+          <p:cNvPr id="12" name="Shape 8"/>
+          <p:cNvSpPr/>
+          <p:nvPr/>
+        </p:nvSpPr>
+        <p:spPr>
+          <a:xfrm>
+            <a:off x="731522" y="2740151"/>
+            <a:ext cx="292608" cy="292608"/>
+          </a:xfrm>
+          <a:prstGeom prst="ellipse">
+            <a:avLst/>
+          </a:prstGeom>
+          <a:solidFill>
+            <a:srgbClr val="10B981">
+              <a:alpha val="18000"/>
+            </a:srgbClr>
+          </a:solidFill>
+          <a:ln w="9525">
+            <a:solidFill>
+              <a:srgbClr val="10B981">
+                <a:alpha val="50000"/>
+              </a:srgbClr>
+            </a:solidFill>
+            <a:prstDash val="solid"/>
+          </a:ln>
+        </p:spPr>
+      </p:sp>
+      <p:pic>
+        <p:nvPicPr>
+          <p:cNvPr id="13" name="Image 2" descr="preencoded.png"/>
+          <p:cNvPicPr>
+            <a:picLocks noChangeAspect="1"/>
+          </p:cNvPicPr>
+          <p:nvPr/>
+        </p:nvPicPr>
+        <p:blipFill>
+          <a:blip r:embed="rId5"/>
+          <a:stretch>
+            <a:fillRect/>
+          </a:stretch>
+        </p:blipFill>
+        <p:spPr>
+          <a:xfrm>
+            <a:off x="804674" y="2813303"/>
+            <a:ext cx="146304" cy="146304"/>
+          </a:xfrm>
+          <a:prstGeom prst="rect">
+            <a:avLst/>
+          </a:prstGeom>
+        </p:spPr>
+      </p:pic>
+      <p:sp>
+        <p:nvSpPr>
+          <p:cNvPr id="14" name="Text 9"/>
+          <p:cNvSpPr/>
+          <p:nvPr/>
+        </p:nvSpPr>
+        <p:spPr>
+          <a:xfrm>
+            <a:off x="1143001" y="2666999"/>
+            <a:ext cx="3643449" cy="484632"/>
+          </a:xfrm>
+          <a:prstGeom prst="rect">
+            <a:avLst/>
+          </a:prstGeom>
+          <a:noFill/>
+          <a:ln/>
+        </p:spPr>
+        <p:txBody>
+          <a:bodyPr wrap="square" lIns="0" tIns="0" rIns="0" bIns="0" rtlCol="0" anchor="ctr"/>
+          <a:lstStyle/>
+          <a:p>
+            <a:pPr marL="0" indent="0" algn="l">
+              <a:buNone/>
+            </a:pPr>
+            <a:r>
+              <a:rPr lang="en-US" sz="1200" dirty="0">
+                <a:solidFill>
+                  <a:schemeClr val="bg2">
+                    <a:lumMod val="50000"/>
+                  </a:schemeClr>
+                </a:solidFill>
+                <a:latin typeface="Calibri" pitchFamily="34" charset="0"/>
+                <a:ea typeface="Calibri" pitchFamily="34" charset="-122"/>
+                <a:cs typeface="Calibri" pitchFamily="34" charset="-120"/>
+              </a:rPr>
+              <a:t>Consistent and standardized release note generation </a:t>
+            </a:r>
+            <a:endParaRPr lang="en-US" sz="1200" dirty="0">
+              <a:solidFill>
+                <a:schemeClr val="bg2">
+                  <a:lumMod val="50000"/>
+                </a:schemeClr>
+              </a:solidFill>
+            </a:endParaRPr>
+          </a:p>
+        </p:txBody>
+      </p:sp>
+      <p:sp>
+        <p:nvSpPr>
+          <p:cNvPr id="15" name="Shape 10"/>
+          <p:cNvSpPr/>
+          <p:nvPr/>
+        </p:nvSpPr>
+        <p:spPr>
+          <a:xfrm>
+            <a:off x="731522" y="3224783"/>
+            <a:ext cx="292608" cy="292608"/>
+          </a:xfrm>
+          <a:prstGeom prst="ellipse">
+            <a:avLst/>
+          </a:prstGeom>
+          <a:solidFill>
+            <a:srgbClr val="10B981">
+              <a:alpha val="18000"/>
+            </a:srgbClr>
+          </a:solidFill>
+          <a:ln w="9525">
+            <a:solidFill>
+              <a:srgbClr val="10B981">
+                <a:alpha val="50000"/>
+              </a:srgbClr>
+            </a:solidFill>
+            <a:prstDash val="solid"/>
+          </a:ln>
+        </p:spPr>
+      </p:sp>
+      <p:pic>
+        <p:nvPicPr>
+          <p:cNvPr id="16" name="Image 3" descr="preencoded.png"/>
+          <p:cNvPicPr>
+            <a:picLocks noChangeAspect="1"/>
+          </p:cNvPicPr>
+          <p:nvPr/>
+        </p:nvPicPr>
+        <p:blipFill>
+          <a:blip r:embed="rId3"/>
+          <a:stretch>
+            <a:fillRect/>
+          </a:stretch>
+        </p:blipFill>
+        <p:spPr>
+          <a:xfrm>
+            <a:off x="804674" y="3297935"/>
+            <a:ext cx="146304" cy="146304"/>
+          </a:xfrm>
+          <a:prstGeom prst="rect">
+            <a:avLst/>
+          </a:prstGeom>
+        </p:spPr>
+      </p:pic>
+      <p:sp>
+        <p:nvSpPr>
+          <p:cNvPr id="17" name="Text 11"/>
+          <p:cNvSpPr/>
+          <p:nvPr/>
+        </p:nvSpPr>
+        <p:spPr>
+          <a:xfrm>
+            <a:off x="1143002" y="3151631"/>
+            <a:ext cx="3246120" cy="484632"/>
+          </a:xfrm>
+          <a:prstGeom prst="rect">
+            <a:avLst/>
+          </a:prstGeom>
+          <a:noFill/>
+          <a:ln/>
+        </p:spPr>
+        <p:txBody>
+          <a:bodyPr wrap="square" lIns="0" tIns="0" rIns="0" bIns="0" rtlCol="0" anchor="ctr"/>
+          <a:lstStyle/>
+          <a:p>
+            <a:pPr marL="0" indent="0" algn="l">
+              <a:buNone/>
+            </a:pPr>
+            <a:r>
+              <a:rPr lang="en-US" sz="1200" dirty="0">
+                <a:solidFill>
+                  <a:schemeClr val="bg2">
+                    <a:lumMod val="50000"/>
+                  </a:schemeClr>
+                </a:solidFill>
+                <a:latin typeface="Calibri" pitchFamily="34" charset="0"/>
+                <a:ea typeface="Calibri" pitchFamily="34" charset="-122"/>
+                <a:cs typeface="Calibri" pitchFamily="34" charset="-120"/>
+              </a:rPr>
+              <a:t>Faster documentation turnaround</a:t>
+            </a:r>
+            <a:endParaRPr lang="en-US" sz="1200" dirty="0">
+              <a:solidFill>
+                <a:schemeClr val="bg2">
+                  <a:lumMod val="50000"/>
+                </a:schemeClr>
+              </a:solidFill>
+            </a:endParaRPr>
+          </a:p>
+        </p:txBody>
+      </p:sp>
+      <p:sp>
+        <p:nvSpPr>
+          <p:cNvPr id="18" name="Shape 12"/>
+          <p:cNvSpPr/>
+          <p:nvPr/>
+        </p:nvSpPr>
+        <p:spPr>
+          <a:xfrm>
+            <a:off x="731522" y="3709415"/>
+            <a:ext cx="292608" cy="292608"/>
+          </a:xfrm>
+          <a:prstGeom prst="ellipse">
+            <a:avLst/>
+          </a:prstGeom>
+          <a:solidFill>
+            <a:srgbClr val="10B981">
+              <a:alpha val="18000"/>
+            </a:srgbClr>
+          </a:solidFill>
+          <a:ln w="9525">
+            <a:solidFill>
+              <a:srgbClr val="10B981">
+                <a:alpha val="50000"/>
+              </a:srgbClr>
+            </a:solidFill>
+            <a:prstDash val="solid"/>
+          </a:ln>
+        </p:spPr>
+      </p:sp>
+      <p:pic>
+        <p:nvPicPr>
+          <p:cNvPr id="19" name="Image 4" descr="preencoded.png"/>
+          <p:cNvPicPr>
+            <a:picLocks noChangeAspect="1"/>
+          </p:cNvPicPr>
+          <p:nvPr/>
+        </p:nvPicPr>
+        <p:blipFill>
+          <a:blip r:embed="rId6"/>
+          <a:stretch>
+            <a:fillRect/>
+          </a:stretch>
+        </p:blipFill>
+        <p:spPr>
+          <a:xfrm>
+            <a:off x="804674" y="3782567"/>
+            <a:ext cx="146304" cy="146304"/>
+          </a:xfrm>
+          <a:prstGeom prst="rect">
+            <a:avLst/>
+          </a:prstGeom>
+        </p:spPr>
+      </p:pic>
+      <p:sp>
+        <p:nvSpPr>
+          <p:cNvPr id="20" name="Text 13"/>
+          <p:cNvSpPr/>
+          <p:nvPr/>
+        </p:nvSpPr>
+        <p:spPr>
+          <a:xfrm>
+            <a:off x="1143002" y="3636263"/>
+            <a:ext cx="3246120" cy="484632"/>
+          </a:xfrm>
+          <a:prstGeom prst="rect">
+            <a:avLst/>
+          </a:prstGeom>
+          <a:noFill/>
+          <a:ln/>
+        </p:spPr>
+        <p:txBody>
+          <a:bodyPr wrap="square" lIns="0" tIns="0" rIns="0" bIns="0" rtlCol="0" anchor="ctr"/>
+          <a:lstStyle/>
+          <a:p>
+            <a:pPr marL="0" indent="0" algn="l">
+              <a:buNone/>
+            </a:pPr>
+            <a:r>
+              <a:rPr lang="en-US" sz="1200" dirty="0">
+                <a:solidFill>
+                  <a:schemeClr val="bg2">
+                    <a:lumMod val="50000"/>
+                  </a:schemeClr>
+                </a:solidFill>
+                <a:latin typeface="Calibri" pitchFamily="34" charset="0"/>
+                <a:ea typeface="Calibri" pitchFamily="34" charset="-122"/>
+                <a:cs typeface="Calibri" pitchFamily="34" charset="-120"/>
+              </a:rPr>
+              <a:t>Publication-ready outputs</a:t>
+            </a:r>
+            <a:endParaRPr lang="en-US" sz="1200" dirty="0">
+              <a:solidFill>
+                <a:schemeClr val="bg2">
+                  <a:lumMod val="50000"/>
+                </a:schemeClr>
+              </a:solidFill>
+            </a:endParaRPr>
+          </a:p>
+        </p:txBody>
+      </p:sp>
+      <p:sp>
+        <p:nvSpPr>
+          <p:cNvPr id="21" name="Shape 14"/>
+          <p:cNvSpPr/>
+          <p:nvPr/>
+        </p:nvSpPr>
+        <p:spPr>
+          <a:xfrm>
+            <a:off x="731522" y="4194047"/>
+            <a:ext cx="292608" cy="292608"/>
+          </a:xfrm>
+          <a:prstGeom prst="ellipse">
+            <a:avLst/>
+          </a:prstGeom>
+          <a:solidFill>
+            <a:srgbClr val="10B981">
+              <a:alpha val="18000"/>
+            </a:srgbClr>
+          </a:solidFill>
+          <a:ln w="9525">
+            <a:solidFill>
+              <a:srgbClr val="10B981">
+                <a:alpha val="50000"/>
+              </a:srgbClr>
+            </a:solidFill>
+            <a:prstDash val="solid"/>
+          </a:ln>
+        </p:spPr>
+      </p:sp>
+      <p:pic>
+        <p:nvPicPr>
+          <p:cNvPr id="22" name="Image 5" descr="preencoded.png"/>
+          <p:cNvPicPr>
+            <a:picLocks noChangeAspect="1"/>
+          </p:cNvPicPr>
+          <p:nvPr/>
+        </p:nvPicPr>
+        <p:blipFill>
+          <a:blip r:embed="rId7"/>
+          <a:stretch>
+            <a:fillRect/>
+          </a:stretch>
+        </p:blipFill>
+        <p:spPr>
+          <a:xfrm>
+            <a:off x="804674" y="4267199"/>
+            <a:ext cx="146304" cy="146304"/>
+          </a:xfrm>
+          <a:prstGeom prst="rect">
+            <a:avLst/>
+          </a:prstGeom>
+        </p:spPr>
+      </p:pic>
+      <p:sp>
+        <p:nvSpPr>
+          <p:cNvPr id="23" name="Text 15"/>
+          <p:cNvSpPr/>
+          <p:nvPr/>
+        </p:nvSpPr>
+        <p:spPr>
+          <a:xfrm>
+            <a:off x="1143002" y="4120895"/>
+            <a:ext cx="3246120" cy="484632"/>
+          </a:xfrm>
+          <a:prstGeom prst="rect">
+            <a:avLst/>
+          </a:prstGeom>
+          <a:noFill/>
+          <a:ln/>
+        </p:spPr>
+        <p:txBody>
+          <a:bodyPr wrap="square" lIns="0" tIns="0" rIns="0" bIns="0" rtlCol="0" anchor="ctr"/>
+          <a:lstStyle/>
+          <a:p>
+            <a:pPr marL="0" indent="0" algn="l">
+              <a:buNone/>
+            </a:pPr>
+            <a:r>
+              <a:rPr lang="en-US" sz="1200" dirty="0">
+                <a:solidFill>
+                  <a:schemeClr val="bg2">
+                    <a:lumMod val="50000"/>
+                  </a:schemeClr>
+                </a:solidFill>
+                <a:latin typeface="Calibri" pitchFamily="34" charset="0"/>
+                <a:ea typeface="Calibri" pitchFamily="34" charset="-122"/>
+                <a:cs typeface="Calibri" pitchFamily="34" charset="-120"/>
+              </a:rPr>
+              <a:t>Improved content quality through AI review</a:t>
+            </a:r>
+            <a:endParaRPr lang="en-US" sz="1200" dirty="0">
+              <a:solidFill>
+                <a:schemeClr val="bg2">
+                  <a:lumMod val="50000"/>
+                </a:schemeClr>
+              </a:solidFill>
+            </a:endParaRPr>
+          </a:p>
+        </p:txBody>
+      </p:sp>
+      <p:sp>
+        <p:nvSpPr>
+          <p:cNvPr id="46" name="Text 32"/>
+          <p:cNvSpPr/>
+          <p:nvPr/>
+        </p:nvSpPr>
+        <p:spPr>
+          <a:xfrm>
+            <a:off x="8001000" y="4773168"/>
+            <a:ext cx="822960" cy="256032"/>
+          </a:xfrm>
+          <a:prstGeom prst="rect">
+            <a:avLst/>
+          </a:prstGeom>
+          <a:noFill/>
+          <a:ln/>
+        </p:spPr>
+        <p:txBody>
+          <a:bodyPr wrap="square" lIns="0" tIns="0" rIns="0" bIns="0" rtlCol="0" anchor="ctr"/>
+          <a:lstStyle/>
+          <a:p>
+            <a:pPr marL="0" indent="0" algn="r">
+              <a:buNone/>
+            </a:pPr>
+            <a:r>
+              <a:rPr lang="en-US" sz="900" b="1" dirty="0">
+                <a:solidFill>
+                  <a:srgbClr val="94A3B8"/>
+                </a:solidFill>
+                <a:latin typeface="Calibri" pitchFamily="34" charset="0"/>
+                <a:ea typeface="Calibri" pitchFamily="34" charset="-122"/>
+                <a:cs typeface="Calibri" pitchFamily="34" charset="-120"/>
+              </a:rPr>
+              <a:t>05</a:t>
+            </a:r>
+            <a:endParaRPr lang="en-US" sz="900" dirty="0"/>
+          </a:p>
+        </p:txBody>
+      </p:sp>
+    </p:spTree>
+  </p:cSld>
+  <p:clrMapOvr>
+    <a:masterClrMapping/>
+  </p:clrMapOvr>
+</p:sld>
+</file>
+
+<file path=ppt/slides/slide11.xml><?xml version="1.0" encoding="utf-8"?>
+<p:sld xmlns:a="http://schemas.openxmlformats.org/drawingml/2006/main" xmlns:r="http://schemas.openxmlformats.org/officeDocument/2006/relationships" xmlns:p="http://schemas.openxmlformats.org/presentationml/2006/main">
+  <p:cSld>
     <p:bg>
       <p:bgPr>
         <a:solidFill>
@@ -5362,7 +6150,7 @@
           <p:nvPr/>
         </p:nvPicPr>
         <p:blipFill>
-          <a:blip r:embed="rId3"/>
+          <a:blip r:embed="rId4"/>
           <a:stretch>
             <a:fillRect/>
           </a:stretch>
@@ -5566,7 +6354,7 @@
           <p:nvPr/>
         </p:nvPicPr>
         <p:blipFill>
-          <a:blip r:embed="rId4"/>
+          <a:blip r:embed="rId5"/>
           <a:stretch>
             <a:fillRect/>
           </a:stretch>
@@ -5735,7 +6523,7 @@
           <p:nvPr/>
         </p:nvPicPr>
         <p:blipFill>
-          <a:blip r:embed="rId5"/>
+          <a:blip r:embed="rId6"/>
           <a:stretch>
             <a:fillRect/>
           </a:stretch>
@@ -5933,7 +6721,7 @@
           <p:nvPr/>
         </p:nvPicPr>
         <p:blipFill>
-          <a:blip r:embed="rId6"/>
+          <a:blip r:embed="rId7"/>
           <a:stretch>
             <a:fillRect/>
           </a:stretch>
@@ -6095,7 +6883,7 @@
                   <pslz:sldZmObj sldId="301" cId="238642846">
                     <pslz:zmPr id="{7529E5C8-B9AB-47D4-9209-C348B921A4B7}" returnToParent="0" transitionDur="1000">
                       <p166:blipFill xmlns:p166="http://schemas.microsoft.com/office/powerpoint/2016/6/main">
-                        <a:blip r:embed="rId7"/>
+                        <a:blip r:embed="rId8"/>
                         <a:stretch>
                           <a:fillRect/>
                         </a:stretch>
@@ -6125,7 +6913,7 @@
           <p:pic>
             <p:nvPicPr>
               <p:cNvPr id="42" name="Slide Zoom 41">
-                <a:hlinkClick r:id="rId8" action="ppaction://hlinksldjump"/>
+                <a:hlinkClick r:id="rId9" action="ppaction://hlinksldjump"/>
                 <a:extLst>
                   <a:ext uri="{FF2B5EF4-FFF2-40B4-BE49-F238E27FC236}">
                     <a16:creationId xmlns:a16="http://schemas.microsoft.com/office/drawing/2014/main" id="{24D156E9-16B3-4D67-BF4A-277A727F14E7}"/>
@@ -6138,7 +6926,7 @@
               <p:nvPr/>
             </p:nvPicPr>
             <p:blipFill>
-              <a:blip r:embed="rId9"/>
+              <a:blip r:embed="rId10"/>
               <a:stretch>
                 <a:fillRect/>
               </a:stretch>
@@ -6186,7 +6974,7 @@
                   <pslz:sldZmObj sldId="302" cId="636061836">
                     <pslz:zmPr id="{236B2021-C4B8-45B5-8A29-717C44C1F6D4}" returnToParent="0" transitionDur="1000">
                       <p166:blipFill xmlns:p166="http://schemas.microsoft.com/office/powerpoint/2016/6/main">
-                        <a:blip r:embed="rId10"/>
+                        <a:blip r:embed="rId11"/>
                         <a:stretch>
                           <a:fillRect/>
                         </a:stretch>
@@ -6216,7 +7004,7 @@
           <p:pic>
             <p:nvPicPr>
               <p:cNvPr id="44" name="Slide Zoom 43">
-                <a:hlinkClick r:id="rId11" action="ppaction://hlinksldjump"/>
+                <a:hlinkClick r:id="rId12" action="ppaction://hlinksldjump"/>
                 <a:extLst>
                   <a:ext uri="{FF2B5EF4-FFF2-40B4-BE49-F238E27FC236}">
                     <a16:creationId xmlns:a16="http://schemas.microsoft.com/office/drawing/2014/main" id="{D6D1C9B8-6BD6-4611-AEB7-7CC68216D952}"/>
@@ -6229,7 +7017,7 @@
               <p:nvPr/>
             </p:nvPicPr>
             <p:blipFill>
-              <a:blip r:embed="rId12"/>
+              <a:blip r:embed="rId13"/>
               <a:stretch>
                 <a:fillRect/>
               </a:stretch>
@@ -6277,7 +7065,7 @@
                   <pslz:sldZmObj sldId="303" cId="3399947531">
                     <pslz:zmPr id="{247751EA-8D89-4621-ADD2-DC73BB8D188D}" returnToParent="0" transitionDur="1000">
                       <p166:blipFill xmlns:p166="http://schemas.microsoft.com/office/powerpoint/2016/6/main">
-                        <a:blip r:embed="rId13"/>
+                        <a:blip r:embed="rId14"/>
                         <a:stretch>
                           <a:fillRect/>
                         </a:stretch>
@@ -6307,7 +7095,7 @@
           <p:pic>
             <p:nvPicPr>
               <p:cNvPr id="46" name="Slide Zoom 45">
-                <a:hlinkClick r:id="rId14" action="ppaction://hlinksldjump"/>
+                <a:hlinkClick r:id="rId15" action="ppaction://hlinksldjump"/>
                 <a:extLst>
                   <a:ext uri="{FF2B5EF4-FFF2-40B4-BE49-F238E27FC236}">
                     <a16:creationId xmlns:a16="http://schemas.microsoft.com/office/drawing/2014/main" id="{4A6FFE5B-4593-4DCF-BA69-9A6295BC077C}"/>
@@ -6320,7 +7108,7 @@
               <p:nvPr/>
             </p:nvPicPr>
             <p:blipFill>
-              <a:blip r:embed="rId15"/>
+              <a:blip r:embed="rId16"/>
               <a:stretch>
                 <a:fillRect/>
               </a:stretch>
@@ -6342,33 +7130,39 @@
           </p:pic>
         </mc:Fallback>
       </mc:AlternateContent>
-      <mc:AlternateContent xmlns:mc="http://schemas.openxmlformats.org/markup-compatibility/2006" xmlns:pslz="http://schemas.microsoft.com/office/powerpoint/2016/slidezoom">
-        <mc:Choice Requires="pslz">
+      <mc:AlternateContent xmlns:mc="http://schemas.openxmlformats.org/markup-compatibility/2006">
+        <mc:Choice xmlns:pslz="http://schemas.microsoft.com/office/powerpoint/2016/slidezoom" Requires="pslz">
           <p:graphicFrame>
             <p:nvGraphicFramePr>
-              <p:cNvPr id="48" name="Slide Zoom 47">
+              <p:cNvPr id="10" name="Slide Zoom 9">
                 <a:extLst>
                   <a:ext uri="{FF2B5EF4-FFF2-40B4-BE49-F238E27FC236}">
-                    <a16:creationId xmlns:a16="http://schemas.microsoft.com/office/drawing/2014/main" id="{B011D2E3-3668-4B62-860C-B7AE74AD58EA}"/>
+                    <a16:creationId xmlns:a16="http://schemas.microsoft.com/office/drawing/2014/main" id="{BAB6DA1F-743B-4785-A8F5-68107AFF1F97}"/>
                   </a:ext>
                 </a:extLst>
               </p:cNvPr>
               <p:cNvGraphicFramePr>
                 <a:graphicFrameLocks noChangeAspect="1"/>
               </p:cNvGraphicFramePr>
-              <p:nvPr/>
+              <p:nvPr>
+                <p:extLst>
+                  <p:ext uri="{D42A27DB-BD31-4B8C-83A1-F6EECF244321}">
+                    <p14:modId xmlns:p14="http://schemas.microsoft.com/office/powerpoint/2010/main" val="1296136966"/>
+                  </p:ext>
+                </p:extLst>
+              </p:nvPr>
             </p:nvGraphicFramePr>
             <p:xfrm>
-              <a:off x="3785616" y="3263836"/>
-              <a:ext cx="2203704" cy="1239584"/>
+              <a:off x="3170790" y="3299133"/>
+              <a:ext cx="2200221" cy="1237624"/>
             </p:xfrm>
             <a:graphic>
               <a:graphicData uri="http://schemas.microsoft.com/office/powerpoint/2016/slidezoom">
                 <pslz:sldZm>
-                  <pslz:sldZmObj sldId="304" cId="288928094">
-                    <pslz:zmPr id="{3D08C4F1-A073-4D32-9149-A621580A2409}" returnToParent="0" transitionDur="1000">
+                  <pslz:sldZmObj sldId="309" cId="1640519903">
+                    <pslz:zmPr id="{9BE59383-CC27-414F-A909-033DE6F91BD7}" returnToParent="0" transitionDur="1000">
                       <p166:blipFill xmlns:p166="http://schemas.microsoft.com/office/powerpoint/2016/6/main">
-                        <a:blip r:embed="rId16"/>
+                        <a:blip r:embed="rId17"/>
                         <a:stretch>
                           <a:fillRect/>
                         </a:stretch>
@@ -6376,7 +7170,7 @@
                       <p166:spPr xmlns:p166="http://schemas.microsoft.com/office/powerpoint/2016/6/main">
                         <a:xfrm>
                           <a:off x="0" y="0"/>
-                          <a:ext cx="2203704" cy="1239584"/>
+                          <a:ext cx="2200221" cy="1237624"/>
                         </a:xfrm>
                         <a:prstGeom prst="rect">
                           <a:avLst/>
@@ -6394,14 +7188,14 @@
             </a:graphic>
           </p:graphicFrame>
         </mc:Choice>
-        <mc:Fallback xmlns="">
+        <mc:Fallback>
           <p:pic>
             <p:nvPicPr>
-              <p:cNvPr id="48" name="Slide Zoom 47">
-                <a:hlinkClick r:id="rId17" action="ppaction://hlinksldjump"/>
+              <p:cNvPr id="10" name="Slide Zoom 9">
+                <a:hlinkClick r:id="rId18" action="ppaction://hlinksldjump"/>
                 <a:extLst>
                   <a:ext uri="{FF2B5EF4-FFF2-40B4-BE49-F238E27FC236}">
-                    <a16:creationId xmlns:a16="http://schemas.microsoft.com/office/drawing/2014/main" id="{B011D2E3-3668-4B62-860C-B7AE74AD58EA}"/>
+                    <a16:creationId xmlns:a16="http://schemas.microsoft.com/office/drawing/2014/main" id="{BAB6DA1F-743B-4785-A8F5-68107AFF1F97}"/>
                   </a:ext>
                 </a:extLst>
               </p:cNvPr>
@@ -6411,15 +7205,15 @@
               <p:nvPr/>
             </p:nvPicPr>
             <p:blipFill>
-              <a:blip r:embed="rId18"/>
+              <a:blip r:embed="rId17"/>
               <a:stretch>
                 <a:fillRect/>
               </a:stretch>
             </p:blipFill>
             <p:spPr>
               <a:xfrm>
-                <a:off x="3785616" y="3263836"/>
-                <a:ext cx="2203704" cy="1239584"/>
+                <a:off x="3170790" y="3299133"/>
+                <a:ext cx="2200221" cy="1237624"/>
               </a:xfrm>
               <a:prstGeom prst="rect">
                 <a:avLst/>
@@ -6433,6 +7227,166 @@
           </p:pic>
         </mc:Fallback>
       </mc:AlternateContent>
+      <mc:AlternateContent xmlns:mc="http://schemas.openxmlformats.org/markup-compatibility/2006">
+        <mc:Choice xmlns:pslz="http://schemas.microsoft.com/office/powerpoint/2016/slidezoom" Requires="pslz">
+          <p:graphicFrame>
+            <p:nvGraphicFramePr>
+              <p:cNvPr id="18" name="Slide Zoom 17">
+                <a:extLst>
+                  <a:ext uri="{FF2B5EF4-FFF2-40B4-BE49-F238E27FC236}">
+                    <a16:creationId xmlns:a16="http://schemas.microsoft.com/office/drawing/2014/main" id="{AE8F9581-05A2-4631-99A9-A5F355ADB358}"/>
+                  </a:ext>
+                </a:extLst>
+              </p:cNvPr>
+              <p:cNvGraphicFramePr>
+                <a:graphicFrameLocks noChangeAspect="1"/>
+              </p:cNvGraphicFramePr>
+              <p:nvPr>
+                <p:extLst>
+                  <p:ext uri="{D42A27DB-BD31-4B8C-83A1-F6EECF244321}">
+                    <p14:modId xmlns:p14="http://schemas.microsoft.com/office/powerpoint/2010/main" val="2022165951"/>
+                  </p:ext>
+                </p:extLst>
+              </p:nvPr>
+            </p:nvGraphicFramePr>
+            <p:xfrm>
+              <a:off x="5428053" y="3325069"/>
+              <a:ext cx="2141874" cy="1204804"/>
+            </p:xfrm>
+            <a:graphic>
+              <a:graphicData uri="http://schemas.microsoft.com/office/powerpoint/2016/slidezoom">
+                <pslz:sldZm>
+                  <pslz:sldZmObj sldId="310" cId="930371033">
+                    <pslz:zmPr id="{C8348A4B-0DA5-446D-9FC5-8078F002AC21}" returnToParent="0" transitionDur="1000">
+                      <p166:blipFill xmlns:p166="http://schemas.microsoft.com/office/powerpoint/2016/6/main">
+                        <a:blip r:embed="rId19"/>
+                        <a:stretch>
+                          <a:fillRect/>
+                        </a:stretch>
+                      </p166:blipFill>
+                      <p166:spPr xmlns:p166="http://schemas.microsoft.com/office/powerpoint/2016/6/main">
+                        <a:xfrm>
+                          <a:off x="0" y="0"/>
+                          <a:ext cx="2141874" cy="1204804"/>
+                        </a:xfrm>
+                        <a:prstGeom prst="rect">
+                          <a:avLst/>
+                        </a:prstGeom>
+                        <a:ln w="3175">
+                          <a:solidFill>
+                            <a:prstClr val="ltGray"/>
+                          </a:solidFill>
+                        </a:ln>
+                      </p166:spPr>
+                    </pslz:zmPr>
+                  </pslz:sldZmObj>
+                </pslz:sldZm>
+              </a:graphicData>
+            </a:graphic>
+          </p:graphicFrame>
+        </mc:Choice>
+        <mc:Fallback>
+          <p:pic>
+            <p:nvPicPr>
+              <p:cNvPr id="18" name="Slide Zoom 17">
+                <a:hlinkClick r:id="rId20" action="ppaction://hlinksldjump"/>
+                <a:extLst>
+                  <a:ext uri="{FF2B5EF4-FFF2-40B4-BE49-F238E27FC236}">
+                    <a16:creationId xmlns:a16="http://schemas.microsoft.com/office/drawing/2014/main" id="{AE8F9581-05A2-4631-99A9-A5F355ADB358}"/>
+                  </a:ext>
+                </a:extLst>
+              </p:cNvPr>
+              <p:cNvPicPr>
+                <a:picLocks noGrp="1" noRot="1" noChangeAspect="1" noMove="1" noResize="1" noEditPoints="1" noAdjustHandles="1" noChangeArrowheads="1" noChangeShapeType="1"/>
+              </p:cNvPicPr>
+              <p:nvPr/>
+            </p:nvPicPr>
+            <p:blipFill>
+              <a:blip r:embed="rId19"/>
+              <a:stretch>
+                <a:fillRect/>
+              </a:stretch>
+            </p:blipFill>
+            <p:spPr>
+              <a:xfrm>
+                <a:off x="5428053" y="3325069"/>
+                <a:ext cx="2141874" cy="1204804"/>
+              </a:xfrm>
+              <a:prstGeom prst="rect">
+                <a:avLst/>
+              </a:prstGeom>
+              <a:ln w="3175">
+                <a:solidFill>
+                  <a:prstClr val="ltGray"/>
+                </a:solidFill>
+              </a:ln>
+            </p:spPr>
+          </p:pic>
+        </mc:Fallback>
+      </mc:AlternateContent>
+      <p:graphicFrame>
+        <p:nvGraphicFramePr>
+          <p:cNvPr id="24" name="Object 23">
+            <a:extLst>
+              <a:ext uri="{FF2B5EF4-FFF2-40B4-BE49-F238E27FC236}">
+                <a16:creationId xmlns:a16="http://schemas.microsoft.com/office/drawing/2014/main" id="{9F31EE9C-6475-45DF-A8E2-B9E8E5A9CAAA}"/>
+              </a:ext>
+            </a:extLst>
+          </p:cNvPr>
+          <p:cNvGraphicFramePr>
+            <a:graphicFrameLocks noChangeAspect="1"/>
+          </p:cNvGraphicFramePr>
+          <p:nvPr>
+            <p:extLst>
+              <p:ext uri="{D42A27DB-BD31-4B8C-83A1-F6EECF244321}">
+                <p14:modId xmlns:p14="http://schemas.microsoft.com/office/powerpoint/2010/main" val="4110088248"/>
+              </p:ext>
+            </p:extLst>
+          </p:nvPr>
+        </p:nvGraphicFramePr>
+        <p:xfrm>
+          <a:off x="7836408" y="3521583"/>
+          <a:ext cx="914400" cy="771525"/>
+        </p:xfrm>
+        <a:graphic>
+          <a:graphicData uri="http://schemas.openxmlformats.org/presentationml/2006/ole">
+            <mc:AlternateContent xmlns:mc="http://schemas.openxmlformats.org/markup-compatibility/2006">
+              <mc:Choice xmlns:v="urn:schemas-microsoft-com:vml" Requires="v">
+                <p:oleObj spid="_x0000_s1026" name="Document" showAsIcon="1" r:id="rId21" imgW="914400" imgH="771480" progId="Word.Document.12">
+                  <p:link updateAutomatic="1"/>
+                </p:oleObj>
+              </mc:Choice>
+              <mc:Fallback>
+                <p:oleObj name="Document" showAsIcon="1" r:id="rId21" imgW="914400" imgH="771480" progId="Word.Document.12">
+                  <p:link updateAutomatic="1"/>
+                  <p:pic>
+                    <p:nvPicPr>
+                      <p:cNvPr id="0" name=""/>
+                      <p:cNvPicPr/>
+                      <p:nvPr/>
+                    </p:nvPicPr>
+                    <p:blipFill>
+                      <a:blip r:embed="rId22"/>
+                      <a:stretch>
+                        <a:fillRect/>
+                      </a:stretch>
+                    </p:blipFill>
+                    <p:spPr>
+                      <a:xfrm>
+                        <a:off x="7836408" y="3521583"/>
+                        <a:ext cx="914400" cy="771525"/>
+                      </a:xfrm>
+                      <a:prstGeom prst="rect">
+                        <a:avLst/>
+                      </a:prstGeom>
+                    </p:spPr>
+                  </p:pic>
+                </p:oleObj>
+              </mc:Fallback>
+            </mc:AlternateContent>
+          </a:graphicData>
+        </a:graphic>
+      </p:graphicFrame>
     </p:spTree>
   </p:cSld>
   <p:clrMapOvr>
@@ -6831,7 +7785,7 @@
           <p:cNvPr id="3" name="Picture 2">
             <a:extLst>
               <a:ext uri="{FF2B5EF4-FFF2-40B4-BE49-F238E27FC236}">
-                <a16:creationId xmlns:a16="http://schemas.microsoft.com/office/drawing/2014/main" id="{7B0CF756-4ED0-45DD-B133-DE9B83F4E21F}"/>
+                <a16:creationId xmlns:a16="http://schemas.microsoft.com/office/drawing/2014/main" id="{4E74B43C-6971-4552-AA17-562F5FC83472}"/>
               </a:ext>
             </a:extLst>
           </p:cNvPr>
@@ -6848,8 +7802,8 @@
         </p:blipFill>
         <p:spPr>
           <a:xfrm>
-            <a:off x="0" y="0"/>
-            <a:ext cx="9144000" cy="5143500"/>
+            <a:off x="-97971" y="0"/>
+            <a:ext cx="9241971" cy="5067300"/>
           </a:xfrm>
           <a:prstGeom prst="rect">
             <a:avLst/>
@@ -6859,67 +7813,7 @@
     </p:spTree>
     <p:extLst>
       <p:ext uri="{BB962C8B-B14F-4D97-AF65-F5344CB8AC3E}">
-        <p14:creationId xmlns:p14="http://schemas.microsoft.com/office/powerpoint/2010/main" val="288928094"/>
-      </p:ext>
-    </p:extLst>
-  </p:cSld>
-  <p:clrMapOvr>
-    <a:masterClrMapping/>
-  </p:clrMapOvr>
-</p:sld>
-</file>
-
-<file path=ppt/slides/slide80.xml><?xml version="1.0" encoding="utf-8"?>
-<p:sld xmlns:a="http://schemas.openxmlformats.org/drawingml/2006/main" xmlns:r="http://schemas.openxmlformats.org/officeDocument/2006/relationships" xmlns:p="http://schemas.openxmlformats.org/presentationml/2006/main">
-  <p:cSld>
-    <p:spTree>
-      <p:nvGrpSpPr>
-        <p:cNvPr id="1" name=""/>
-        <p:cNvGrpSpPr/>
-        <p:nvPr/>
-      </p:nvGrpSpPr>
-      <p:grpSpPr>
-        <a:xfrm>
-          <a:off x="0" y="0"/>
-          <a:ext cx="0" cy="0"/>
-          <a:chOff x="0" y="0"/>
-          <a:chExt cx="0" cy="0"/>
-        </a:xfrm>
-      </p:grpSpPr>
-      <p:pic>
-        <p:nvPicPr>
-          <p:cNvPr id="3" name="Picture 2">
-            <a:extLst>
-              <a:ext uri="{FF2B5EF4-FFF2-40B4-BE49-F238E27FC236}">
-                <a16:creationId xmlns:a16="http://schemas.microsoft.com/office/drawing/2014/main" id="{7B0CF756-4ED0-45DD-B133-DE9B83F4E21F}"/>
-              </a:ext>
-            </a:extLst>
-          </p:cNvPr>
-          <p:cNvPicPr>
-            <a:picLocks noChangeAspect="1"/>
-          </p:cNvPicPr>
-          <p:nvPr/>
-        </p:nvPicPr>
-        <p:blipFill>
-          <a:blip r:embed="rId2"/>
-          <a:stretch>
-            <a:fillRect/>
-          </a:stretch>
-        </p:blipFill>
-        <p:spPr>
-          <a:xfrm>
-            <a:off x="0" y="0"/>
-            <a:ext cx="9144000" cy="5143500"/>
-          </a:xfrm>
-          <a:prstGeom prst="rect">
-            <a:avLst/>
-          </a:prstGeom>
-        </p:spPr>
-      </p:pic>
-    </p:spTree>
-    <p:extLst>
-      <p:ext uri="{BB962C8B-B14F-4D97-AF65-F5344CB8AC3E}">
-        <p14:creationId xmlns:p14="http://schemas.microsoft.com/office/powerpoint/2010/main" val="288928094"/>
+        <p14:creationId xmlns:p14="http://schemas.microsoft.com/office/powerpoint/2010/main" val="1640519903"/>
       </p:ext>
     </p:extLst>
   </p:cSld>
@@ -6946,769 +7840,42 @@
           <a:chExt cx="0" cy="0"/>
         </a:xfrm>
       </p:grpSpPr>
-      <p:sp>
-        <p:nvSpPr>
-          <p:cNvPr id="2" name="Shape 0"/>
-          <p:cNvSpPr/>
-          <p:nvPr/>
-        </p:nvSpPr>
-        <p:spPr>
-          <a:xfrm>
-            <a:off x="457200" y="365760"/>
-            <a:ext cx="896112" cy="237744"/>
-          </a:xfrm>
-          <a:prstGeom prst="roundRect">
-            <a:avLst>
-              <a:gd name="adj" fmla="val 50000"/>
-            </a:avLst>
-          </a:prstGeom>
-          <a:noFill/>
-          <a:ln/>
-        </p:spPr>
-      </p:sp>
-      <p:sp>
-        <p:nvSpPr>
-          <p:cNvPr id="3" name="Text 1"/>
-          <p:cNvSpPr/>
-          <p:nvPr/>
-        </p:nvSpPr>
-        <p:spPr>
-          <a:xfrm>
-            <a:off x="457200" y="365760"/>
-            <a:ext cx="896112" cy="237744"/>
-          </a:xfrm>
-          <a:prstGeom prst="rect">
-            <a:avLst/>
-          </a:prstGeom>
-          <a:noFill/>
-          <a:ln/>
-        </p:spPr>
-        <p:txBody>
-          <a:bodyPr wrap="square" lIns="0" tIns="0" rIns="0" bIns="0" rtlCol="0" anchor="ctr"/>
-          <a:lstStyle/>
-          <a:p>
-            <a:r>
-              <a:rPr lang="en-US" sz="1100" b="1" kern="0" spc="150" dirty="0">
-                <a:solidFill>
-                  <a:srgbClr val="2A9D8F"/>
-                </a:solidFill>
-                <a:latin typeface="Calibri" pitchFamily="34" charset="0"/>
-                <a:cs typeface="Calibri" pitchFamily="34" charset="-120"/>
-              </a:rPr>
-              <a:t>04  IMPACT</a:t>
-            </a:r>
-          </a:p>
-        </p:txBody>
-      </p:sp>
-      <p:sp>
-        <p:nvSpPr>
-          <p:cNvPr id="4" name="Text 2"/>
-          <p:cNvSpPr/>
-          <p:nvPr/>
-        </p:nvSpPr>
-        <p:spPr>
-          <a:xfrm>
-            <a:off x="457200" y="640080"/>
-            <a:ext cx="8229600" cy="502920"/>
-          </a:xfrm>
-          <a:prstGeom prst="rect">
-            <a:avLst/>
-          </a:prstGeom>
-          <a:noFill/>
-          <a:ln/>
-        </p:spPr>
-        <p:txBody>
-          <a:bodyPr wrap="square" lIns="0" tIns="0" rIns="0" bIns="0" rtlCol="0" anchor="ctr"/>
-          <a:lstStyle/>
-          <a:p>
-            <a:r>
-              <a:rPr lang="en-US" sz="2500" b="1" dirty="0">
-                <a:solidFill>
-                  <a:srgbClr val="12355B"/>
-                </a:solidFill>
-                <a:latin typeface="Cambria" pitchFamily="34" charset="0"/>
-                <a:ea typeface="Cambria" pitchFamily="34" charset="-122"/>
-              </a:rPr>
-              <a:t>Business Value</a:t>
-            </a:r>
-          </a:p>
-        </p:txBody>
-      </p:sp>
-      <p:sp>
-        <p:nvSpPr>
-          <p:cNvPr id="5" name="Shape 3"/>
-          <p:cNvSpPr/>
-          <p:nvPr/>
-        </p:nvSpPr>
-        <p:spPr>
-          <a:xfrm>
-            <a:off x="457200" y="1313687"/>
-            <a:ext cx="6248400" cy="3429000"/>
-          </a:xfrm>
-          <a:prstGeom prst="roundRect">
-            <a:avLst>
-              <a:gd name="adj" fmla="val 2667"/>
-            </a:avLst>
-          </a:prstGeom>
-          <a:solidFill>
-            <a:srgbClr val="EEF1F3"/>
-          </a:solidFill>
-          <a:ln w="9525">
-            <a:solidFill>
-              <a:srgbClr val="EEF1F3"/>
-            </a:solidFill>
-            <a:prstDash val="solid"/>
-          </a:ln>
-          <a:effectLst>
-            <a:outerShdw blurRad="152400" dist="38100" dir="5400000" algn="bl" rotWithShape="0">
-              <a:srgbClr val="000000">
-                <a:alpha val="35000"/>
-              </a:srgbClr>
-            </a:outerShdw>
-          </a:effectLst>
-        </p:spPr>
-        <p:txBody>
-          <a:bodyPr/>
-          <a:lstStyle/>
-          <a:p>
-            <a:endParaRPr lang="en-IN" dirty="0"/>
-          </a:p>
-        </p:txBody>
-      </p:sp>
-      <p:sp>
-        <p:nvSpPr>
-          <p:cNvPr id="6" name="Shape 4"/>
-          <p:cNvSpPr/>
-          <p:nvPr/>
-        </p:nvSpPr>
-        <p:spPr>
-          <a:xfrm>
-            <a:off x="731522" y="1542287"/>
-            <a:ext cx="457200" cy="457200"/>
-          </a:xfrm>
-          <a:prstGeom prst="ellipse">
-            <a:avLst/>
-          </a:prstGeom>
-          <a:solidFill>
-            <a:srgbClr val="10B981">
-              <a:alpha val="22000"/>
-            </a:srgbClr>
-          </a:solidFill>
-          <a:ln w="12700">
-            <a:solidFill>
-              <a:srgbClr val="10B981"/>
-            </a:solidFill>
-            <a:prstDash val="solid"/>
-          </a:ln>
-        </p:spPr>
-      </p:sp>
       <p:pic>
         <p:nvPicPr>
-          <p:cNvPr id="7" name="Image 0" descr="preencoded.png"/>
+          <p:cNvPr id="3" name="Picture 2">
+            <a:extLst>
+              <a:ext uri="{FF2B5EF4-FFF2-40B4-BE49-F238E27FC236}">
+                <a16:creationId xmlns:a16="http://schemas.microsoft.com/office/drawing/2014/main" id="{F9B6EDE3-6AE3-49AB-BB58-1A42E38F00E9}"/>
+              </a:ext>
+            </a:extLst>
+          </p:cNvPr>
           <p:cNvPicPr>
             <a:picLocks noChangeAspect="1"/>
           </p:cNvPicPr>
           <p:nvPr/>
         </p:nvPicPr>
         <p:blipFill>
-          <a:blip r:embed="rId3"/>
+          <a:blip r:embed="rId2"/>
           <a:stretch>
             <a:fillRect/>
           </a:stretch>
         </p:blipFill>
         <p:spPr>
           <a:xfrm>
-            <a:off x="841250" y="1652015"/>
-            <a:ext cx="237744" cy="237744"/>
+            <a:off x="0" y="0"/>
+            <a:ext cx="9144000" cy="5018314"/>
           </a:xfrm>
           <a:prstGeom prst="rect">
             <a:avLst/>
           </a:prstGeom>
         </p:spPr>
       </p:pic>
-      <p:sp>
-        <p:nvSpPr>
-          <p:cNvPr id="8" name="Text 5"/>
-          <p:cNvSpPr/>
-          <p:nvPr/>
-        </p:nvSpPr>
-        <p:spPr>
-          <a:xfrm>
-            <a:off x="1325882" y="1542287"/>
-            <a:ext cx="3063240" cy="457200"/>
-          </a:xfrm>
-          <a:prstGeom prst="rect">
-            <a:avLst/>
-          </a:prstGeom>
-          <a:noFill/>
-          <a:ln/>
-        </p:spPr>
-        <p:txBody>
-          <a:bodyPr wrap="square" lIns="0" tIns="0" rIns="0" bIns="0" rtlCol="0" anchor="ctr"/>
-          <a:lstStyle/>
-          <a:p>
-            <a:pPr marL="0" indent="0" algn="l">
-              <a:buNone/>
-            </a:pPr>
-            <a:r>
-              <a:rPr lang="en-US" sz="1800" b="1" dirty="0">
-                <a:solidFill>
-                  <a:srgbClr val="12355B"/>
-                </a:solidFill>
-                <a:latin typeface="Calibri" pitchFamily="34" charset="0"/>
-                <a:ea typeface="Calibri" pitchFamily="34" charset="-122"/>
-                <a:cs typeface="Calibri" pitchFamily="34" charset="-120"/>
-              </a:rPr>
-              <a:t>Benefits</a:t>
-            </a:r>
-            <a:endParaRPr lang="en-US" sz="1800" dirty="0">
-              <a:solidFill>
-                <a:srgbClr val="12355B"/>
-              </a:solidFill>
-            </a:endParaRPr>
-          </a:p>
-        </p:txBody>
-      </p:sp>
-      <p:sp>
-        <p:nvSpPr>
-          <p:cNvPr id="9" name="Shape 6"/>
-          <p:cNvSpPr/>
-          <p:nvPr/>
-        </p:nvSpPr>
-        <p:spPr>
-          <a:xfrm>
-            <a:off x="731522" y="2255519"/>
-            <a:ext cx="292608" cy="292608"/>
-          </a:xfrm>
-          <a:prstGeom prst="ellipse">
-            <a:avLst/>
-          </a:prstGeom>
-          <a:solidFill>
-            <a:srgbClr val="10B981">
-              <a:alpha val="18000"/>
-            </a:srgbClr>
-          </a:solidFill>
-          <a:ln w="9525">
-            <a:solidFill>
-              <a:srgbClr val="10B981">
-                <a:alpha val="50000"/>
-              </a:srgbClr>
-            </a:solidFill>
-            <a:prstDash val="solid"/>
-          </a:ln>
-        </p:spPr>
-      </p:sp>
-      <p:pic>
-        <p:nvPicPr>
-          <p:cNvPr id="10" name="Image 1" descr="preencoded.png"/>
-          <p:cNvPicPr>
-            <a:picLocks noChangeAspect="1"/>
-          </p:cNvPicPr>
-          <p:nvPr/>
-        </p:nvPicPr>
-        <p:blipFill>
-          <a:blip r:embed="rId4"/>
-          <a:stretch>
-            <a:fillRect/>
-          </a:stretch>
-        </p:blipFill>
-        <p:spPr>
-          <a:xfrm>
-            <a:off x="804674" y="2328671"/>
-            <a:ext cx="146304" cy="146304"/>
-          </a:xfrm>
-          <a:prstGeom prst="rect">
-            <a:avLst/>
-          </a:prstGeom>
-        </p:spPr>
-      </p:pic>
-      <p:sp>
-        <p:nvSpPr>
-          <p:cNvPr id="11" name="Text 7"/>
-          <p:cNvSpPr/>
-          <p:nvPr/>
-        </p:nvSpPr>
-        <p:spPr>
-          <a:xfrm>
-            <a:off x="1143002" y="2182367"/>
-            <a:ext cx="4046220" cy="484632"/>
-          </a:xfrm>
-          <a:prstGeom prst="rect">
-            <a:avLst/>
-          </a:prstGeom>
-          <a:noFill/>
-          <a:ln/>
-        </p:spPr>
-        <p:txBody>
-          <a:bodyPr wrap="square" lIns="0" tIns="0" rIns="0" bIns="0" rtlCol="0" anchor="ctr"/>
-          <a:lstStyle/>
-          <a:p>
-            <a:pPr marL="0" indent="0" algn="l">
-              <a:buNone/>
-            </a:pPr>
-            <a:r>
-              <a:rPr lang="en-US" sz="1200" dirty="0">
-                <a:solidFill>
-                  <a:schemeClr val="bg2">
-                    <a:lumMod val="50000"/>
-                  </a:schemeClr>
-                </a:solidFill>
-                <a:latin typeface="Calibri" pitchFamily="34" charset="0"/>
-                <a:ea typeface="Calibri" pitchFamily="34" charset="-122"/>
-                <a:cs typeface="Calibri" pitchFamily="34" charset="-120"/>
-              </a:rPr>
-              <a:t>Reduced manual documentation effort in release note creation</a:t>
-            </a:r>
-            <a:endParaRPr lang="en-US" sz="1200" dirty="0">
-              <a:solidFill>
-                <a:schemeClr val="bg2">
-                  <a:lumMod val="50000"/>
-                </a:schemeClr>
-              </a:solidFill>
-            </a:endParaRPr>
-          </a:p>
-        </p:txBody>
-      </p:sp>
-      <p:sp>
-        <p:nvSpPr>
-          <p:cNvPr id="12" name="Shape 8"/>
-          <p:cNvSpPr/>
-          <p:nvPr/>
-        </p:nvSpPr>
-        <p:spPr>
-          <a:xfrm>
-            <a:off x="731522" y="2740151"/>
-            <a:ext cx="292608" cy="292608"/>
-          </a:xfrm>
-          <a:prstGeom prst="ellipse">
-            <a:avLst/>
-          </a:prstGeom>
-          <a:solidFill>
-            <a:srgbClr val="10B981">
-              <a:alpha val="18000"/>
-            </a:srgbClr>
-          </a:solidFill>
-          <a:ln w="9525">
-            <a:solidFill>
-              <a:srgbClr val="10B981">
-                <a:alpha val="50000"/>
-              </a:srgbClr>
-            </a:solidFill>
-            <a:prstDash val="solid"/>
-          </a:ln>
-        </p:spPr>
-      </p:sp>
-      <p:pic>
-        <p:nvPicPr>
-          <p:cNvPr id="13" name="Image 2" descr="preencoded.png"/>
-          <p:cNvPicPr>
-            <a:picLocks noChangeAspect="1"/>
-          </p:cNvPicPr>
-          <p:nvPr/>
-        </p:nvPicPr>
-        <p:blipFill>
-          <a:blip r:embed="rId5"/>
-          <a:stretch>
-            <a:fillRect/>
-          </a:stretch>
-        </p:blipFill>
-        <p:spPr>
-          <a:xfrm>
-            <a:off x="804674" y="2813303"/>
-            <a:ext cx="146304" cy="146304"/>
-          </a:xfrm>
-          <a:prstGeom prst="rect">
-            <a:avLst/>
-          </a:prstGeom>
-        </p:spPr>
-      </p:pic>
-      <p:sp>
-        <p:nvSpPr>
-          <p:cNvPr id="14" name="Text 9"/>
-          <p:cNvSpPr/>
-          <p:nvPr/>
-        </p:nvSpPr>
-        <p:spPr>
-          <a:xfrm>
-            <a:off x="1143001" y="2666999"/>
-            <a:ext cx="3643449" cy="484632"/>
-          </a:xfrm>
-          <a:prstGeom prst="rect">
-            <a:avLst/>
-          </a:prstGeom>
-          <a:noFill/>
-          <a:ln/>
-        </p:spPr>
-        <p:txBody>
-          <a:bodyPr wrap="square" lIns="0" tIns="0" rIns="0" bIns="0" rtlCol="0" anchor="ctr"/>
-          <a:lstStyle/>
-          <a:p>
-            <a:pPr marL="0" indent="0" algn="l">
-              <a:buNone/>
-            </a:pPr>
-            <a:r>
-              <a:rPr lang="en-US" sz="1200" dirty="0">
-                <a:solidFill>
-                  <a:schemeClr val="bg2">
-                    <a:lumMod val="50000"/>
-                  </a:schemeClr>
-                </a:solidFill>
-                <a:latin typeface="Calibri" pitchFamily="34" charset="0"/>
-                <a:ea typeface="Calibri" pitchFamily="34" charset="-122"/>
-                <a:cs typeface="Calibri" pitchFamily="34" charset="-120"/>
-              </a:rPr>
-              <a:t>Consistent and standardized release note generation </a:t>
-            </a:r>
-            <a:endParaRPr lang="en-US" sz="1200" dirty="0">
-              <a:solidFill>
-                <a:schemeClr val="bg2">
-                  <a:lumMod val="50000"/>
-                </a:schemeClr>
-              </a:solidFill>
-            </a:endParaRPr>
-          </a:p>
-        </p:txBody>
-      </p:sp>
-      <p:sp>
-        <p:nvSpPr>
-          <p:cNvPr id="15" name="Shape 10"/>
-          <p:cNvSpPr/>
-          <p:nvPr/>
-        </p:nvSpPr>
-        <p:spPr>
-          <a:xfrm>
-            <a:off x="731522" y="3224783"/>
-            <a:ext cx="292608" cy="292608"/>
-          </a:xfrm>
-          <a:prstGeom prst="ellipse">
-            <a:avLst/>
-          </a:prstGeom>
-          <a:solidFill>
-            <a:srgbClr val="10B981">
-              <a:alpha val="18000"/>
-            </a:srgbClr>
-          </a:solidFill>
-          <a:ln w="9525">
-            <a:solidFill>
-              <a:srgbClr val="10B981">
-                <a:alpha val="50000"/>
-              </a:srgbClr>
-            </a:solidFill>
-            <a:prstDash val="solid"/>
-          </a:ln>
-        </p:spPr>
-      </p:sp>
-      <p:pic>
-        <p:nvPicPr>
-          <p:cNvPr id="16" name="Image 3" descr="preencoded.png"/>
-          <p:cNvPicPr>
-            <a:picLocks noChangeAspect="1"/>
-          </p:cNvPicPr>
-          <p:nvPr/>
-        </p:nvPicPr>
-        <p:blipFill>
-          <a:blip r:embed="rId3"/>
-          <a:stretch>
-            <a:fillRect/>
-          </a:stretch>
-        </p:blipFill>
-        <p:spPr>
-          <a:xfrm>
-            <a:off x="804674" y="3297935"/>
-            <a:ext cx="146304" cy="146304"/>
-          </a:xfrm>
-          <a:prstGeom prst="rect">
-            <a:avLst/>
-          </a:prstGeom>
-        </p:spPr>
-      </p:pic>
-      <p:sp>
-        <p:nvSpPr>
-          <p:cNvPr id="17" name="Text 11"/>
-          <p:cNvSpPr/>
-          <p:nvPr/>
-        </p:nvSpPr>
-        <p:spPr>
-          <a:xfrm>
-            <a:off x="1143002" y="3151631"/>
-            <a:ext cx="3246120" cy="484632"/>
-          </a:xfrm>
-          <a:prstGeom prst="rect">
-            <a:avLst/>
-          </a:prstGeom>
-          <a:noFill/>
-          <a:ln/>
-        </p:spPr>
-        <p:txBody>
-          <a:bodyPr wrap="square" lIns="0" tIns="0" rIns="0" bIns="0" rtlCol="0" anchor="ctr"/>
-          <a:lstStyle/>
-          <a:p>
-            <a:pPr marL="0" indent="0" algn="l">
-              <a:buNone/>
-            </a:pPr>
-            <a:r>
-              <a:rPr lang="en-US" sz="1200" dirty="0">
-                <a:solidFill>
-                  <a:schemeClr val="bg2">
-                    <a:lumMod val="50000"/>
-                  </a:schemeClr>
-                </a:solidFill>
-                <a:latin typeface="Calibri" pitchFamily="34" charset="0"/>
-                <a:ea typeface="Calibri" pitchFamily="34" charset="-122"/>
-                <a:cs typeface="Calibri" pitchFamily="34" charset="-120"/>
-              </a:rPr>
-              <a:t>Faster documentation turnaround</a:t>
-            </a:r>
-            <a:endParaRPr lang="en-US" sz="1200" dirty="0">
-              <a:solidFill>
-                <a:schemeClr val="bg2">
-                  <a:lumMod val="50000"/>
-                </a:schemeClr>
-              </a:solidFill>
-            </a:endParaRPr>
-          </a:p>
-        </p:txBody>
-      </p:sp>
-      <p:sp>
-        <p:nvSpPr>
-          <p:cNvPr id="18" name="Shape 12"/>
-          <p:cNvSpPr/>
-          <p:nvPr/>
-        </p:nvSpPr>
-        <p:spPr>
-          <a:xfrm>
-            <a:off x="731522" y="3709415"/>
-            <a:ext cx="292608" cy="292608"/>
-          </a:xfrm>
-          <a:prstGeom prst="ellipse">
-            <a:avLst/>
-          </a:prstGeom>
-          <a:solidFill>
-            <a:srgbClr val="10B981">
-              <a:alpha val="18000"/>
-            </a:srgbClr>
-          </a:solidFill>
-          <a:ln w="9525">
-            <a:solidFill>
-              <a:srgbClr val="10B981">
-                <a:alpha val="50000"/>
-              </a:srgbClr>
-            </a:solidFill>
-            <a:prstDash val="solid"/>
-          </a:ln>
-        </p:spPr>
-      </p:sp>
-      <p:pic>
-        <p:nvPicPr>
-          <p:cNvPr id="19" name="Image 4" descr="preencoded.png"/>
-          <p:cNvPicPr>
-            <a:picLocks noChangeAspect="1"/>
-          </p:cNvPicPr>
-          <p:nvPr/>
-        </p:nvPicPr>
-        <p:blipFill>
-          <a:blip r:embed="rId6"/>
-          <a:stretch>
-            <a:fillRect/>
-          </a:stretch>
-        </p:blipFill>
-        <p:spPr>
-          <a:xfrm>
-            <a:off x="804674" y="3782567"/>
-            <a:ext cx="146304" cy="146304"/>
-          </a:xfrm>
-          <a:prstGeom prst="rect">
-            <a:avLst/>
-          </a:prstGeom>
-        </p:spPr>
-      </p:pic>
-      <p:sp>
-        <p:nvSpPr>
-          <p:cNvPr id="20" name="Text 13"/>
-          <p:cNvSpPr/>
-          <p:nvPr/>
-        </p:nvSpPr>
-        <p:spPr>
-          <a:xfrm>
-            <a:off x="1143002" y="3636263"/>
-            <a:ext cx="3246120" cy="484632"/>
-          </a:xfrm>
-          <a:prstGeom prst="rect">
-            <a:avLst/>
-          </a:prstGeom>
-          <a:noFill/>
-          <a:ln/>
-        </p:spPr>
-        <p:txBody>
-          <a:bodyPr wrap="square" lIns="0" tIns="0" rIns="0" bIns="0" rtlCol="0" anchor="ctr"/>
-          <a:lstStyle/>
-          <a:p>
-            <a:pPr marL="0" indent="0" algn="l">
-              <a:buNone/>
-            </a:pPr>
-            <a:r>
-              <a:rPr lang="en-US" sz="1200" dirty="0">
-                <a:solidFill>
-                  <a:schemeClr val="bg2">
-                    <a:lumMod val="50000"/>
-                  </a:schemeClr>
-                </a:solidFill>
-                <a:latin typeface="Calibri" pitchFamily="34" charset="0"/>
-                <a:ea typeface="Calibri" pitchFamily="34" charset="-122"/>
-                <a:cs typeface="Calibri" pitchFamily="34" charset="-120"/>
-              </a:rPr>
-              <a:t>Publication-ready outputs</a:t>
-            </a:r>
-            <a:endParaRPr lang="en-US" sz="1200" dirty="0">
-              <a:solidFill>
-                <a:schemeClr val="bg2">
-                  <a:lumMod val="50000"/>
-                </a:schemeClr>
-              </a:solidFill>
-            </a:endParaRPr>
-          </a:p>
-        </p:txBody>
-      </p:sp>
-      <p:sp>
-        <p:nvSpPr>
-          <p:cNvPr id="21" name="Shape 14"/>
-          <p:cNvSpPr/>
-          <p:nvPr/>
-        </p:nvSpPr>
-        <p:spPr>
-          <a:xfrm>
-            <a:off x="731522" y="4194047"/>
-            <a:ext cx="292608" cy="292608"/>
-          </a:xfrm>
-          <a:prstGeom prst="ellipse">
-            <a:avLst/>
-          </a:prstGeom>
-          <a:solidFill>
-            <a:srgbClr val="10B981">
-              <a:alpha val="18000"/>
-            </a:srgbClr>
-          </a:solidFill>
-          <a:ln w="9525">
-            <a:solidFill>
-              <a:srgbClr val="10B981">
-                <a:alpha val="50000"/>
-              </a:srgbClr>
-            </a:solidFill>
-            <a:prstDash val="solid"/>
-          </a:ln>
-        </p:spPr>
-      </p:sp>
-      <p:pic>
-        <p:nvPicPr>
-          <p:cNvPr id="22" name="Image 5" descr="preencoded.png"/>
-          <p:cNvPicPr>
-            <a:picLocks noChangeAspect="1"/>
-          </p:cNvPicPr>
-          <p:nvPr/>
-        </p:nvPicPr>
-        <p:blipFill>
-          <a:blip r:embed="rId7"/>
-          <a:stretch>
-            <a:fillRect/>
-          </a:stretch>
-        </p:blipFill>
-        <p:spPr>
-          <a:xfrm>
-            <a:off x="804674" y="4267199"/>
-            <a:ext cx="146304" cy="146304"/>
-          </a:xfrm>
-          <a:prstGeom prst="rect">
-            <a:avLst/>
-          </a:prstGeom>
-        </p:spPr>
-      </p:pic>
-      <p:sp>
-        <p:nvSpPr>
-          <p:cNvPr id="23" name="Text 15"/>
-          <p:cNvSpPr/>
-          <p:nvPr/>
-        </p:nvSpPr>
-        <p:spPr>
-          <a:xfrm>
-            <a:off x="1143002" y="4120895"/>
-            <a:ext cx="3246120" cy="484632"/>
-          </a:xfrm>
-          <a:prstGeom prst="rect">
-            <a:avLst/>
-          </a:prstGeom>
-          <a:noFill/>
-          <a:ln/>
-        </p:spPr>
-        <p:txBody>
-          <a:bodyPr wrap="square" lIns="0" tIns="0" rIns="0" bIns="0" rtlCol="0" anchor="ctr"/>
-          <a:lstStyle/>
-          <a:p>
-            <a:pPr marL="0" indent="0" algn="l">
-              <a:buNone/>
-            </a:pPr>
-            <a:r>
-              <a:rPr lang="en-US" sz="1200" dirty="0">
-                <a:solidFill>
-                  <a:schemeClr val="bg2">
-                    <a:lumMod val="50000"/>
-                  </a:schemeClr>
-                </a:solidFill>
-                <a:latin typeface="Calibri" pitchFamily="34" charset="0"/>
-                <a:ea typeface="Calibri" pitchFamily="34" charset="-122"/>
-                <a:cs typeface="Calibri" pitchFamily="34" charset="-120"/>
-              </a:rPr>
-              <a:t>Improved content quality through AI review</a:t>
-            </a:r>
-            <a:endParaRPr lang="en-US" sz="1200" dirty="0">
-              <a:solidFill>
-                <a:schemeClr val="bg2">
-                  <a:lumMod val="50000"/>
-                </a:schemeClr>
-              </a:solidFill>
-            </a:endParaRPr>
-          </a:p>
-        </p:txBody>
-      </p:sp>
-      <p:sp>
-        <p:nvSpPr>
-          <p:cNvPr id="46" name="Text 32"/>
-          <p:cNvSpPr/>
-          <p:nvPr/>
-        </p:nvSpPr>
-        <p:spPr>
-          <a:xfrm>
-            <a:off x="8001000" y="4773168"/>
-            <a:ext cx="822960" cy="256032"/>
-          </a:xfrm>
-          <a:prstGeom prst="rect">
-            <a:avLst/>
-          </a:prstGeom>
-          <a:noFill/>
-          <a:ln/>
-        </p:spPr>
-        <p:txBody>
-          <a:bodyPr wrap="square" lIns="0" tIns="0" rIns="0" bIns="0" rtlCol="0" anchor="ctr"/>
-          <a:lstStyle/>
-          <a:p>
-            <a:pPr marL="0" indent="0" algn="r">
-              <a:buNone/>
-            </a:pPr>
-            <a:r>
-              <a:rPr lang="en-US" sz="900" b="1" dirty="0">
-                <a:solidFill>
-                  <a:srgbClr val="94A3B8"/>
-                </a:solidFill>
-                <a:latin typeface="Calibri" pitchFamily="34" charset="0"/>
-                <a:ea typeface="Calibri" pitchFamily="34" charset="-122"/>
-                <a:cs typeface="Calibri" pitchFamily="34" charset="-120"/>
-              </a:rPr>
-              <a:t>05</a:t>
-            </a:r>
-            <a:endParaRPr lang="en-US" sz="900" dirty="0"/>
-          </a:p>
-        </p:txBody>
-      </p:sp>
     </p:spTree>
+    <p:extLst>
+      <p:ext uri="{BB962C8B-B14F-4D97-AF65-F5344CB8AC3E}">
+        <p14:creationId xmlns:p14="http://schemas.microsoft.com/office/powerpoint/2010/main" val="930371033"/>
+      </p:ext>
+    </p:extLst>
   </p:cSld>
   <p:clrMapOvr>
     <a:masterClrMapping/>

--- a/demo/AI-release-note-generation Team - Capstone Project_Bhargavi.pptx
+++ b/demo/AI-release-note-generation Team - Capstone Project_Bhargavi.pptx
@@ -7339,7 +7339,7 @@
           <p:nvPr>
             <p:extLst>
               <p:ext uri="{D42A27DB-BD31-4B8C-83A1-F6EECF244321}">
-                <p14:modId xmlns:p14="http://schemas.microsoft.com/office/powerpoint/2010/main" val="4110088248"/>
+                <p14:modId xmlns:p14="http://schemas.microsoft.com/office/powerpoint/2010/main" val="1212596527"/>
               </p:ext>
             </p:extLst>
           </p:nvPr>
@@ -7352,7 +7352,7 @@
           <a:graphicData uri="http://schemas.openxmlformats.org/presentationml/2006/ole">
             <mc:AlternateContent xmlns:mc="http://schemas.openxmlformats.org/markup-compatibility/2006">
               <mc:Choice xmlns:v="urn:schemas-microsoft-com:vml" Requires="v">
-                <p:oleObj spid="_x0000_s1026" name="Document" showAsIcon="1" r:id="rId21" imgW="914400" imgH="771480" progId="Word.Document.12">
+                <p:oleObj spid="_x0000_s1028" name="Document" showAsIcon="1" r:id="rId21" imgW="914400" imgH="771480" progId="Word.Document.12">
                   <p:link updateAutomatic="1"/>
                 </p:oleObj>
               </mc:Choice>
